--- a/Week01_JavaBasics.pptx
+++ b/Week01_JavaBasics.pptx
@@ -5457,8 +5457,8 @@
         </p:nvSpPr>
         <p:spPr>
           <a:xfrm>
-            <a:off x="731520" y="365760"/>
-            <a:ext cx="2743200" cy="548640"/>
+            <a:off x="731520" y="228600"/>
+            <a:ext cx="1828800" cy="502920"/>
           </a:xfrm>
           <a:prstGeom prst="rect">
             <a:avLst/>
@@ -5472,7 +5472,7 @@
           <a:lstStyle/>
           <a:p>
             <a:pPr>
-              <a:defRPr sz="2800" b="1">
+              <a:defRPr sz="2600" b="1">
                 <a:solidFill>
                   <a:srgbClr val="0EA5E9"/>
                 </a:solidFill>
@@ -5493,8 +5493,44 @@
         </p:nvSpPr>
         <p:spPr>
           <a:xfrm>
-            <a:off x="731520" y="1097280"/>
-            <a:ext cx="7680960" cy="3657600"/>
+            <a:off x="731520" y="713232"/>
+            <a:ext cx="5486400" cy="320040"/>
+          </a:xfrm>
+          <a:prstGeom prst="rect">
+            <a:avLst/>
+          </a:prstGeom>
+          <a:noFill/>
+        </p:spPr>
+        <p:txBody>
+          <a:bodyPr wrap="none">
+            <a:spAutoFit/>
+          </a:bodyPr>
+          <a:lstStyle/>
+          <a:p>
+            <a:pPr>
+              <a:defRPr sz="1300">
+                <a:solidFill>
+                  <a:srgbClr val="CADCFC"/>
+                </a:solidFill>
+                <a:latin typeface="Calibri"/>
+              </a:defRPr>
+            </a:pPr>
+            <a:r>
+              <a:t>Week 01 — 다음 질문에 답해 보세요</a:t>
+            </a:r>
+          </a:p>
+        </p:txBody>
+      </p:sp>
+      <p:sp>
+        <p:nvSpPr>
+          <p:cNvPr id="6" name="TextBox 5"/>
+          <p:cNvSpPr txBox="1"/>
+          <p:nvPr/>
+        </p:nvSpPr>
+        <p:spPr>
+          <a:xfrm>
+            <a:off x="731520" y="1115568"/>
+            <a:ext cx="5029200" cy="3474720"/>
           </a:xfrm>
           <a:prstGeom prst="rect">
             <a:avLst/>
@@ -5509,9 +5545,9 @@
           <a:p>
             <a:pPr>
               <a:spcAft>
-                <a:spcPts val="1400"/>
-              </a:spcAft>
-              <a:defRPr sz="1600">
+                <a:spcPts val="1000"/>
+              </a:spcAft>
+              <a:defRPr sz="1400">
                 <a:solidFill>
                   <a:srgbClr val="FFFFFF"/>
                 </a:solidFill>
@@ -5519,15 +5555,15 @@
               </a:defRPr>
             </a:pPr>
             <a:r>
-              <a:t>Q1. 타입 추론(Type Inference)이란 무엇인가?</a:t>
+              <a:t>Q1. `args.length`는 어떤 의미인가?</a:t>
             </a:r>
           </a:p>
           <a:p>
             <a:pPr>
               <a:spcAft>
-                <a:spcPts val="1400"/>
-              </a:spcAft>
-              <a:defRPr sz="1600">
+                <a:spcPts val="1000"/>
+              </a:spcAft>
+              <a:defRPr sz="1400">
                 <a:solidFill>
                   <a:srgbClr val="FFFFFF"/>
                 </a:solidFill>
@@ -5535,15 +5571,15 @@
               </a:defRPr>
             </a:pPr>
             <a:r>
-              <a:t>Q2. double x = 3.14를 int로 캐스팅하면 결과는?</a:t>
+              <a:t>Q2. `(int) 4.18`의 결과가 왜 4인가? 소수점 이하는 어떻게 되는가?</a:t>
             </a:r>
           </a:p>
           <a:p>
             <a:pPr>
               <a:spcAft>
-                <a:spcPts val="1400"/>
-              </a:spcAft>
-              <a:defRPr sz="1600">
+                <a:spcPts val="1000"/>
+              </a:spcAft>
+              <a:defRPr sz="1400">
                 <a:solidFill>
                   <a:srgbClr val="FFFFFF"/>
                 </a:solidFill>
@@ -5551,15 +5587,15 @@
               </a:defRPr>
             </a:pPr>
             <a:r>
-              <a:t>Q3. 중첩 반복문에서 외부 루프를 탈출하는 방법은?</a:t>
+              <a:t>Q3. `ex03`에서 별 개수를 `i * 2 + 1`로 계산하는 이유는 무엇인가?</a:t>
             </a:r>
           </a:p>
           <a:p>
             <a:pPr>
               <a:spcAft>
-                <a:spcPts val="1400"/>
-              </a:spcAft>
-              <a:defRPr sz="1600">
+                <a:spcPts val="1000"/>
+              </a:spcAft>
+              <a:defRPr sz="1400">
                 <a:solidFill>
                   <a:srgbClr val="FFFFFF"/>
                 </a:solidFill>
@@ -5567,7 +5603,173 @@
               </a:defRPr>
             </a:pPr>
             <a:r>
-              <a:t>Q4. printf("%d", 10 / 3)의 출력 결과는?</a:t>
+              <a:t>Q4. 일반 `break`와 라벨드(labeled) `break`의 차이는 무엇인가?</a:t>
+            </a:r>
+          </a:p>
+        </p:txBody>
+      </p:sp>
+      <p:sp>
+        <p:nvSpPr>
+          <p:cNvPr id="7" name="Rectangle 6"/>
+          <p:cNvSpPr/>
+          <p:nvPr/>
+        </p:nvSpPr>
+        <p:spPr>
+          <a:xfrm>
+            <a:off x="5943600" y="1115568"/>
+            <a:ext cx="27432" cy="3474720"/>
+          </a:xfrm>
+          <a:prstGeom prst="rect">
+            <a:avLst/>
+          </a:prstGeom>
+          <a:solidFill>
+            <a:srgbClr val="3B527E"/>
+          </a:solidFill>
+          <a:ln>
+            <a:noFill/>
+          </a:ln>
+        </p:spPr>
+        <p:style>
+          <a:lnRef idx="1">
+            <a:schemeClr val="accent1"/>
+          </a:lnRef>
+          <a:fillRef idx="3">
+            <a:schemeClr val="accent1"/>
+          </a:fillRef>
+          <a:effectRef idx="2">
+            <a:schemeClr val="accent1"/>
+          </a:effectRef>
+          <a:fontRef idx="minor">
+            <a:schemeClr val="lt1"/>
+          </a:fontRef>
+        </p:style>
+        <p:txBody>
+          <a:bodyPr rtlCol="0" anchor="ctr"/>
+          <a:lstStyle/>
+          <a:p>
+            <a:pPr algn="ctr"/>
+          </a:p>
+        </p:txBody>
+      </p:sp>
+      <p:sp>
+        <p:nvSpPr>
+          <p:cNvPr id="8" name="TextBox 7"/>
+          <p:cNvSpPr txBox="1"/>
+          <p:nvPr/>
+        </p:nvSpPr>
+        <p:spPr>
+          <a:xfrm>
+            <a:off x="6080760" y="1115568"/>
+            <a:ext cx="2834640" cy="365760"/>
+          </a:xfrm>
+          <a:prstGeom prst="rect">
+            <a:avLst/>
+          </a:prstGeom>
+          <a:noFill/>
+        </p:spPr>
+        <p:txBody>
+          <a:bodyPr wrap="none">
+            <a:spAutoFit/>
+          </a:bodyPr>
+          <a:lstStyle/>
+          <a:p>
+            <a:pPr>
+              <a:defRPr sz="1400" b="1">
+                <a:solidFill>
+                  <a:srgbClr val="0EA5E9"/>
+                </a:solidFill>
+                <a:latin typeface="Georgia"/>
+              </a:defRPr>
+            </a:pPr>
+            <a:r>
+              <a:t>추가 실습</a:t>
+            </a:r>
+          </a:p>
+        </p:txBody>
+      </p:sp>
+      <p:sp>
+        <p:nvSpPr>
+          <p:cNvPr id="9" name="TextBox 8"/>
+          <p:cNvSpPr txBox="1"/>
+          <p:nvPr/>
+        </p:nvSpPr>
+        <p:spPr>
+          <a:xfrm>
+            <a:off x="6080760" y="1499616"/>
+            <a:ext cx="2834640" cy="3108960"/>
+          </a:xfrm>
+          <a:prstGeom prst="rect">
+            <a:avLst/>
+          </a:prstGeom>
+          <a:noFill/>
+        </p:spPr>
+        <p:txBody>
+          <a:bodyPr wrap="square">
+            <a:spAutoFit/>
+          </a:bodyPr>
+          <a:lstStyle/>
+          <a:p>
+            <a:pPr>
+              <a:spcAft>
+                <a:spcPts val="800"/>
+              </a:spcAft>
+              <a:defRPr sz="1200">
+                <a:solidFill>
+                  <a:srgbClr val="CADCFC"/>
+                </a:solidFill>
+                <a:latin typeface="Calibri"/>
+              </a:defRPr>
+            </a:pPr>
+            <a:r>
+              <a:t>① ex01에서 인자가 없을 때 '인자를 입력하세요' 안내 문구 출력하기</a:t>
+            </a:r>
+          </a:p>
+          <a:p>
+            <a:pPr>
+              <a:spcAft>
+                <a:spcPts val="800"/>
+              </a:spcAft>
+              <a:defRPr sz="1200">
+                <a:solidFill>
+                  <a:srgbClr val="CADCFC"/>
+                </a:solidFill>
+                <a:latin typeface="Calibri"/>
+              </a:defRPr>
+            </a:pPr>
+            <a:r>
+              <a:t>② ex02에서 이름, 학번, 평균 점수를 함께 printf로 출력하기</a:t>
+            </a:r>
+          </a:p>
+          <a:p>
+            <a:pPr>
+              <a:spcAft>
+                <a:spcPts val="800"/>
+              </a:spcAft>
+              <a:defRPr sz="1200">
+                <a:solidFill>
+                  <a:srgbClr val="CADCFC"/>
+                </a:solidFill>
+                <a:latin typeface="Calibri"/>
+              </a:defRPr>
+            </a:pPr>
+            <a:r>
+              <a:t>③ ex03을 역피라미드(▽) 또는 마름모 모양으로 바꾸기</a:t>
+            </a:r>
+          </a:p>
+          <a:p>
+            <a:pPr>
+              <a:spcAft>
+                <a:spcPts val="800"/>
+              </a:spcAft>
+              <a:defRPr sz="1200">
+                <a:solidFill>
+                  <a:srgbClr val="CADCFC"/>
+                </a:solidFill>
+                <a:latin typeface="Calibri"/>
+              </a:defRPr>
+            </a:pPr>
+            <a:r>
+              <a:t>④ ex04에서 점수를 다른 값으로 바꿔 if-else 결과를 직접 비교하기</a:t>
             </a:r>
           </a:p>
         </p:txBody>
